--- a/slides/pptx/week10.pptx
+++ b/slides/pptx/week10.pptx
@@ -781,7 +781,7 @@
           <a:p>
             <a:r>
               <a:rPr lang="en-US" dirty="0"/>
-              <a:t>Explain before lab: the local app IS the graded lab — 65 of 100 points, all four tasks above. crAPI is a genuinely fun bonus with zero grading weight and no fix/patch step — don't imply "Round 2" fixes crAPI, nothing does. Defend (task 4) is read-and-cite against a pre-written solution, not student-authored code. Q6 of the quiz asks for the mass-assignment field + fix + personal flag from the LOCAL target. ~3 min.</a:t>
+              <a:t>Explain before lab: the local app IS the graded lab — 65 of 100 points, all four tasks above. crAPI is a genuinely fun bonus with zero grading weight and no fix/patch step — don't imply "Round 2" fixes crAPI, nothing does. Defend (task 4) is read-and-cite against a pre-written solution, not student-authored code. The weekly quiz no longer asks for the mass-assignment field/fix/flag (dropped — quiz runs before the lab) — that's required in the worksheet instead. ~3 min.</a:t>
             </a:r>
             <a:endParaRPr lang="en-US" dirty="0"/>
           </a:p>
@@ -869,7 +869,7 @@
           <a:p>
             <a:r>
               <a:rPr lang="en-US" dirty="0"/>
-              <a:t>Explain before lab: the local app IS the graded lab — 65 of 100 points, all four tasks above. crAPI is a genuinely fun bonus with zero grading weight and no fix/patch step — don't imply "Round 2" fixes crAPI, nothing does. Defend (task 4) is read-and-cite against a pre-written solution, not student-authored code. Q6 of the quiz asks for the mass-assignment field + fix + personal flag from the LOCAL target. ~3 min.</a:t>
+              <a:t>Explain before lab: the local app IS the graded lab — 65 of 100 points, all four tasks above. crAPI is a genuinely fun bonus with zero grading weight and no fix/patch step — don't imply "Round 2" fixes crAPI, nothing does. Defend (task 4) is read-and-cite against a pre-written solution, not student-authored code. The weekly quiz no longer asks for the mass-assignment field/fix/flag (dropped — quiz runs before the lab) — that's required in the worksheet instead. ~3 min.</a:t>
             </a:r>
             <a:endParaRPr lang="en-US" dirty="0"/>
           </a:p>
@@ -957,7 +957,7 @@
           <a:p>
             <a:r>
               <a:rPr lang="en-US" dirty="0"/>
-              <a:t>Before/after + API-Top-10 mapping. AI-resilient tasks count. Also the NoteVault project API task. Both flags come from the local target — remind students crAPI capture isn't part of the deliverable.</a:t>
+              <a:t>Before/after + API-Top-10 mapping. AI-resilient tasks count. Also the NoteVault project API task. Both flags come from the local target (public demo values — practice, not attributable) — remind students crAPI capture isn't part of the deliverable.</a:t>
             </a:r>
             <a:endParaRPr lang="en-US" dirty="0"/>
           </a:p>
@@ -4098,7 +4098,7 @@
                 <a:ea typeface="Calibri" pitchFamily="34" charset="-122"/>
                 <a:cs typeface="Calibri" pitchFamily="34" charset="-120"/>
               </a:rPr>
-              <a:t>Findings mapped to the API Top 10:2023 + your two personal flags (FLAG_BOLA, FLAG_MASSASSIGN)</a:t>
+              <a:t>Findings mapped to the API Top 10:2023 + your two flags (FLAG_BOLA, FLAG_MASSASSIGN — public demo values on a local run: practice, not personal)</a:t>
             </a:r>
             <a:endParaRPr lang="en-US" sz="1400" dirty="0"/>
           </a:p>
